--- a/docs/라즈베리파이5_백엔드_연동_ELI5_가이드.pptx
+++ b/docs/라즈베리파이5_백엔드_연동_ELI5_가이드.pptx
@@ -4029,7 +4029,7 @@
               </a:defRPr>
             </a:pPr>
             <a:r>
-              <a:t>2. 비밀 암호 도장 (DEVICE_API_KEY)  ➡️  wake_up_2026_09_05_v1_0_0</a:t>
+              <a:t>2. 비밀 암호 도장 (DEVICE_API_KEY)  ➡️  우리팀이_정한_비밀키</a:t>
             </a:r>
           </a:p>
           <a:p>
@@ -4321,7 +4321,7 @@
             </a:r>
             <a:br/>
             <a:r>
-              <a:t>X-Device-Api-Key: wake_up_2026_09_05_v1_0_0</a:t>
+              <a:t>X-Device-Api-Key: 우리팀이_정한_비밀키</a:t>
             </a:r>
           </a:p>
           <a:p>
@@ -5746,7 +5746,7 @@
             </a:r>
             <a:br/>
             <a:r>
-              <a:t>(예: wake_up_2026_09_05_v1_0_0)</a:t>
+              <a:t>(예: 우리팀이_정한_비밀키)</a:t>
             </a:r>
           </a:p>
         </p:txBody>
